--- a/assets/Manuscripts/L1715_Sim16_Instructor Slides.pptx
+++ b/assets/Manuscripts/L1715_Sim16_Instructor Slides.pptx
@@ -462,7 +462,7 @@
           <a:p>
             <a:fld id="{9389D1CC-DA6D-B540-B3AB-1D3F7252007E}" type="datetimeFigureOut">
               <a:rPr lang="en-US" smtClean="0"/>
-              <a:t>8/12/2026</a:t>
+              <a:t>8/14/2026</a:t>
             </a:fld>
             <a:endParaRPr lang="en-US" dirty="0"/>
           </a:p>
@@ -3177,7 +3177,7 @@
           <a:p>
             <a:fld id="{73751BD0-6F40-8441-BA56-9EA644E5E3FB}" type="datetimeFigureOut">
               <a:rPr lang="en-US" smtClean="0"/>
-              <a:t>8/12/2026</a:t>
+              <a:t>8/14/2026</a:t>
             </a:fld>
             <a:endParaRPr lang="en-US" dirty="0"/>
           </a:p>
@@ -3375,7 +3375,7 @@
           <a:p>
             <a:fld id="{73751BD0-6F40-8441-BA56-9EA644E5E3FB}" type="datetimeFigureOut">
               <a:rPr lang="en-US" smtClean="0"/>
-              <a:t>8/12/2026</a:t>
+              <a:t>8/14/2026</a:t>
             </a:fld>
             <a:endParaRPr lang="en-US" dirty="0"/>
           </a:p>
@@ -3583,7 +3583,7 @@
           <a:p>
             <a:fld id="{73751BD0-6F40-8441-BA56-9EA644E5E3FB}" type="datetimeFigureOut">
               <a:rPr lang="en-US" smtClean="0"/>
-              <a:t>8/12/2026</a:t>
+              <a:t>8/14/2026</a:t>
             </a:fld>
             <a:endParaRPr lang="en-US" dirty="0"/>
           </a:p>
@@ -3781,7 +3781,7 @@
           <a:p>
             <a:fld id="{73751BD0-6F40-8441-BA56-9EA644E5E3FB}" type="datetimeFigureOut">
               <a:rPr lang="en-US" smtClean="0"/>
-              <a:t>8/12/2026</a:t>
+              <a:t>8/14/2026</a:t>
             </a:fld>
             <a:endParaRPr lang="en-US" dirty="0"/>
           </a:p>
@@ -4056,7 +4056,7 @@
           <a:p>
             <a:fld id="{73751BD0-6F40-8441-BA56-9EA644E5E3FB}" type="datetimeFigureOut">
               <a:rPr lang="en-US" smtClean="0"/>
-              <a:t>8/12/2026</a:t>
+              <a:t>8/14/2026</a:t>
             </a:fld>
             <a:endParaRPr lang="en-US" dirty="0"/>
           </a:p>
@@ -4321,7 +4321,7 @@
           <a:p>
             <a:fld id="{73751BD0-6F40-8441-BA56-9EA644E5E3FB}" type="datetimeFigureOut">
               <a:rPr lang="en-US" smtClean="0"/>
-              <a:t>8/12/2026</a:t>
+              <a:t>8/14/2026</a:t>
             </a:fld>
             <a:endParaRPr lang="en-US" dirty="0"/>
           </a:p>
@@ -4733,7 +4733,7 @@
           <a:p>
             <a:fld id="{73751BD0-6F40-8441-BA56-9EA644E5E3FB}" type="datetimeFigureOut">
               <a:rPr lang="en-US" smtClean="0"/>
-              <a:t>8/12/2026</a:t>
+              <a:t>8/14/2026</a:t>
             </a:fld>
             <a:endParaRPr lang="en-US" dirty="0"/>
           </a:p>
@@ -4874,7 +4874,7 @@
           <a:p>
             <a:fld id="{73751BD0-6F40-8441-BA56-9EA644E5E3FB}" type="datetimeFigureOut">
               <a:rPr lang="en-US" smtClean="0"/>
-              <a:t>8/12/2026</a:t>
+              <a:t>8/14/2026</a:t>
             </a:fld>
             <a:endParaRPr lang="en-US" dirty="0"/>
           </a:p>
@@ -4987,7 +4987,7 @@
           <a:p>
             <a:fld id="{73751BD0-6F40-8441-BA56-9EA644E5E3FB}" type="datetimeFigureOut">
               <a:rPr lang="en-US" smtClean="0"/>
-              <a:t>8/12/2026</a:t>
+              <a:t>8/14/2026</a:t>
             </a:fld>
             <a:endParaRPr lang="en-US" dirty="0"/>
           </a:p>
@@ -5298,7 +5298,7 @@
           <a:p>
             <a:fld id="{73751BD0-6F40-8441-BA56-9EA644E5E3FB}" type="datetimeFigureOut">
               <a:rPr lang="en-US" smtClean="0"/>
-              <a:t>8/12/2026</a:t>
+              <a:t>8/14/2026</a:t>
             </a:fld>
             <a:endParaRPr lang="en-US" dirty="0"/>
           </a:p>
@@ -5586,7 +5586,7 @@
           <a:p>
             <a:fld id="{73751BD0-6F40-8441-BA56-9EA644E5E3FB}" type="datetimeFigureOut">
               <a:rPr lang="en-US" smtClean="0"/>
-              <a:t>8/12/2026</a:t>
+              <a:t>8/14/2026</a:t>
             </a:fld>
             <a:endParaRPr lang="en-US" dirty="0"/>
           </a:p>
@@ -5827,7 +5827,7 @@
           <a:p>
             <a:fld id="{73751BD0-6F40-8441-BA56-9EA644E5E3FB}" type="datetimeFigureOut">
               <a:rPr lang="en-US" smtClean="0"/>
-              <a:t>8/12/2026</a:t>
+              <a:t>8/14/2026</a:t>
             </a:fld>
             <a:endParaRPr lang="en-US" dirty="0"/>
           </a:p>
@@ -12211,8 +12211,8 @@
         </p:nvSpPr>
         <p:spPr>
           <a:xfrm>
-            <a:off x="834453" y="6086007"/>
-            <a:ext cx="10523094" cy="707886"/>
+            <a:off x="2263515" y="6175948"/>
+            <a:ext cx="7664970" cy="400110"/>
           </a:xfrm>
           <a:prstGeom prst="rect">
             <a:avLst/>
@@ -12229,7 +12229,7 @@
               <a:defRPr/>
             </a:pPr>
             <a:r>
-              <a:rPr lang="en-US" sz="2000" dirty="0"/>
+              <a:rPr lang="en-US" sz="1000" dirty="0"/>
               <a:t>Adapted from ccrweb.ca, © Slyvia Duckworth. Distributed under the terms of the Creative Commons Attribution 4.0 International License (http://creativecommons.org/licenses/by/4.0/).</a:t>
             </a:r>
           </a:p>
